--- a/FIGURAS/Fig1_flujo_STROBE.pptx
+++ b/FIGURAS/Fig1_flujo_STROBE.pptx
@@ -2796,8 +2796,8 @@
           </p:nvSpPr>
           <p:spPr>
             <a:xfrm>
-              <a:off x="1923726" y="2408902"/>
-              <a:ext cx="540318" cy="82661"/>
+              <a:off x="1919428" y="2408902"/>
+              <a:ext cx="548914" cy="82661"/>
             </a:xfrm>
             <a:prstGeom prst="rect">
               <a:avLst/>
@@ -2826,7 +2826,7 @@
                   <a:latin typeface="Arial"/>
                   <a:cs typeface="Arial"/>
                 </a:rPr>
-                <a:t>n = 25 411</a:t>
+                <a:t>n = 25 410</a:t>
               </a:r>
             </a:p>
           </p:txBody>
@@ -2912,7 +2912,7 @@
                   <a:latin typeface="Arial"/>
                   <a:cs typeface="Arial"/>
                 </a:rPr>
-                <a:t>n = 25 090</a:t>
+                <a:t>n = 25 089</a:t>
               </a:r>
             </a:p>
           </p:txBody>
@@ -3041,7 +3041,7 @@
                   <a:latin typeface="Arial"/>
                   <a:cs typeface="Arial"/>
                 </a:rPr>
-                <a:t>n = 25 089</a:t>
+                <a:t>n = 25 088</a:t>
               </a:r>
             </a:p>
           </p:txBody>
@@ -3170,7 +3170,7 @@
                   <a:latin typeface="Arial"/>
                   <a:cs typeface="Arial"/>
                 </a:rPr>
-                <a:t>n = 7 756</a:t>
+                <a:t>n = 7 735</a:t>
               </a:r>
             </a:p>
           </p:txBody>
@@ -3256,7 +3256,7 @@
                   <a:latin typeface="Arial"/>
                   <a:cs typeface="Arial"/>
                 </a:rPr>
-                <a:t>n = 5 204</a:t>
+                <a:t>n = 5 203</a:t>
               </a:r>
             </a:p>
           </p:txBody>
@@ -3385,7 +3385,7 @@
                   <a:latin typeface="Arial"/>
                   <a:cs typeface="Arial"/>
                 </a:rPr>
-                <a:t>n = 4 389</a:t>
+                <a:t>n = 4 388</a:t>
               </a:r>
             </a:p>
           </p:txBody>
@@ -4301,7 +4301,7 @@
                   <a:latin typeface="Arial"/>
                   <a:cs typeface="Arial"/>
                 </a:rPr>
-                <a:t>Excluidos: 19 600</a:t>
+                <a:t>Excluidos: 19 601</a:t>
               </a:r>
             </a:p>
           </p:txBody>
@@ -4559,7 +4559,7 @@
                   <a:latin typeface="Arial"/>
                   <a:cs typeface="Arial"/>
                 </a:rPr>
-                <a:t>Excluidos: 2 552</a:t>
+                <a:t>Excluidos: 2 532</a:t>
               </a:r>
             </a:p>
           </p:txBody>
